--- a/kvcache/unified_kv_memory/提前验证方案设计/验证计划方案设计/开发人员串讲PPT/统一异构KVCache存储池_项目实施作战指导_20260825_预审版.pptx
+++ b/kvcache/unified_kv_memory/提前验证方案设计/验证计划方案设计/开发人员串讲PPT/统一异构KVCache存储池_项目实施作战指导_20260825_预审版.pptx
@@ -4533,7 +4533,7 @@
                 </a:solidFill>
                 <a:latin typeface="Microsoft YaHei"/>
               </a:rPr>
-              <a:t>破解多卡加载偏斜，</a:t>
+              <a:t>破解非等比偏斜，</a:t>
             </a:r>
             <a:r>
               <a:rPr sz="1150" b="1">
@@ -4864,7 +4864,7 @@
                 </a:solidFill>
                 <a:latin typeface="Microsoft YaHei"/>
               </a:rPr>
-              <a:t>• E3 全链路混压总门禁：</a:t>
+              <a:t>• 全链路混压总门禁：</a:t>
             </a:r>
             <a:r>
               <a:rPr sz="1150">
@@ -4873,7 +4873,7 @@
                 </a:solidFill>
                 <a:latin typeface="Microsoft YaHei"/>
               </a:rPr>
-              <a:t>在真实混压下测定</a:t>
+              <a:t>实测</a:t>
             </a:r>
             <a:r>
               <a:rPr sz="1150" b="1">
@@ -4882,7 +4882,7 @@
                 </a:solidFill>
                 <a:latin typeface="Microsoft YaHei"/>
               </a:rPr>
-              <a:t>TTFT 降低 ≥20% 且干扰率 &lt; 3%</a:t>
+              <a:t> TTFT 降 ≥20%、前台干扰 &lt; 3%</a:t>
             </a:r>
             <a:r>
               <a:rPr sz="1150">
@@ -4891,7 +4891,7 @@
                 </a:solidFill>
                 <a:latin typeface="Microsoft YaHei"/>
               </a:rPr>
-              <a:t>。</a:t>
+              <a:t>，偏斜 &lt; 1.15。</a:t>
             </a:r>
           </a:p>
         </p:txBody>
@@ -6361,7 +6361,7 @@
                         </a:defRPr>
                       </a:pPr>
                       <a:r>
-                        <a:t>树状组播分发 (PVT-08)、DPU 双轨 (PVT-09) 与混压总门禁实测</a:t>
+                        <a:t>多流 Incast/Coflow 偏斜 (PVT-10)、树状组播与混压总门禁</a:t>
                       </a:r>
                     </a:p>
                   </a:txBody>
@@ -6388,7 +6388,7 @@
                         </a:defRPr>
                       </a:pPr>
                       <a:r>
-                        <a:t>网络 Incast 混沌注入工具，全量 CSV 测试数据自动化清洗与对账</a:t>
+                        <a:t>网络 Incast 混沌注入与 Coflow 偏斜测试套件，全量 CSV 数据自动化对账</a:t>
                       </a:r>
                     </a:p>
                   </a:txBody>
@@ -6415,7 +6415,7 @@
                         </a:defRPr>
                       </a:pPr>
                       <a:r>
-                        <a:t>CP-09,13,18 ｜ PVT-07~09</a:t>
+                        <a:t>CP-09,13 ｜ PVT-07~10</a:t>
                       </a:r>
                     </a:p>
                   </a:txBody>
@@ -9204,7 +9204,7 @@
               </a:defRPr>
             </a:pPr>
             <a:r>
-              <a:t>• RoCE 硬件队列隔离，干扰率 &lt; 3% (SR-29)</a:t>
+              <a:t>• RoCE 队列隔离与 Coflow 偏斜控制 (PVT-07/10)</a:t>
             </a:r>
           </a:p>
           <a:p>
@@ -9223,7 +9223,7 @@
               </a:defRPr>
             </a:pPr>
             <a:r>
-              <a:t>• DPU 与纯软 500µs 无缝降级 (PVT-09)</a:t>
+              <a:t>• Layer 0 优先点火与 DPU 双轨 500µs 降级 (PVT-09)</a:t>
             </a:r>
           </a:p>
         </p:txBody>
@@ -9967,7 +9967,7 @@
                 </a:solidFill>
                 <a:latin typeface="Microsoft YaHei"/>
               </a:rPr>
-              <a:t>▶ PVT-01~03 路径打通</a:t>
+              <a:t>▶ PVT-01~03 &amp; 10 路径</a:t>
             </a:r>
           </a:p>
           <a:p>
@@ -9986,7 +9986,7 @@
                 </a:solidFill>
                 <a:latin typeface="Microsoft YaHei"/>
               </a:rPr>
-              <a:t>URMA 零拷贝 · 64B 契约 · 6 维一致性</a:t>
+              <a:t>URMA 零拷贝 · 64B 契约 · Incast 回环</a:t>
             </a:r>
           </a:p>
           <a:p>
@@ -10381,7 +10381,7 @@
                 </a:solidFill>
                 <a:latin typeface="Microsoft YaHei"/>
               </a:rPr>
-              <a:t>▶ PVT-07~09 混压生态</a:t>
+              <a:t>▶ PVT-07~10 混压生态</a:t>
             </a:r>
           </a:p>
           <a:p>
@@ -10400,7 +10400,7 @@
                 </a:solidFill>
                 <a:latin typeface="Microsoft YaHei"/>
               </a:rPr>
-              <a:t>全链路混压 · 树状组播 · DPU 双轨</a:t>
+              <a:t>全链路混压 · Incast/Coflow · 树状组播</a:t>
             </a:r>
           </a:p>
           <a:p>
@@ -10419,7 +10419,7 @@
                 </a:solidFill>
                 <a:latin typeface="Microsoft YaHei"/>
               </a:rPr>
-              <a:t>【终审准出】 TTFT降≥20% · 干扰&lt;3%</a:t>
+              <a:t>【终审准出】 TTFT降≥20% · 偏斜&lt;1.15</a:t>
             </a:r>
           </a:p>
         </p:txBody>
@@ -10947,7 +10947,7 @@
                 </a:solidFill>
                 <a:latin typeface="Microsoft YaHei"/>
               </a:rPr>
-              <a:t>完成 PVT-03 6 维语义一致性校验，保障 0 错误消费。</a:t>
+              <a:t>完成 PVT-03/06 语义校验与 PVT-10 Incast 回环测试桩。</a:t>
             </a:r>
           </a:p>
           <a:p>
@@ -11422,7 +11422,7 @@
                 </a:solidFill>
                 <a:latin typeface="Microsoft YaHei"/>
               </a:rPr>
-              <a:t>攻坚 PVT-06 原子并发协同，</a:t>
+              <a:t>攻坚 PVT-06/10 多卡协同，</a:t>
             </a:r>
             <a:r>
               <a:rPr sz="880" b="1">
@@ -11431,7 +11431,7 @@
                 </a:solidFill>
                 <a:latin typeface="Microsoft YaHei"/>
               </a:rPr>
-              <a:t>消除多卡加载偏斜与时延差</a:t>
+              <a:t>消除 Coflow 偏斜与时序差</a:t>
             </a:r>
             <a:r>
               <a:rPr sz="880">
@@ -11657,7 +11657,7 @@
                 </a:solidFill>
                 <a:latin typeface="Microsoft YaHei"/>
               </a:rPr>
-              <a:t>  [E3门禁准出]</a:t>
+              <a:t>  [E3准出]</a:t>
             </a:r>
           </a:p>
         </p:txBody>
@@ -11888,7 +11888,7 @@
                 </a:solidFill>
                 <a:latin typeface="Microsoft YaHei"/>
               </a:rPr>
-              <a:t>• 全链路混压总门禁实测：</a:t>
+              <a:t>• 全链路混压与动力学门禁：</a:t>
             </a:r>
           </a:p>
           <a:p>
@@ -11919,7 +11919,7 @@
                 </a:solidFill>
                 <a:latin typeface="Microsoft YaHei"/>
               </a:rPr>
-              <a:t>主导 PVT-07 真实混压测试，测定 </a:t>
+              <a:t>主导 PVT-07/10 混压，</a:t>
             </a:r>
             <a:r>
               <a:rPr sz="880" b="1">
@@ -11928,7 +11928,7 @@
                 </a:solidFill>
                 <a:latin typeface="Microsoft YaHei"/>
               </a:rPr>
-              <a:t>TTFT 降低 ≥20%，前台干扰率 &lt; 3%</a:t>
+              <a:t>实测 TTFT 降 ≥20%，偏斜 &lt; 1.15 且干扰 &lt; 3%</a:t>
             </a:r>
             <a:r>
               <a:rPr sz="880">
@@ -11968,7 +11968,7 @@
                 </a:solidFill>
                 <a:latin typeface="Microsoft YaHei"/>
               </a:rPr>
-              <a:t>验证高并发在线推流稳定性，确保尾部时延不抖动。</a:t>
+              <a:t>验证 Layer 0 硬件优先级点火，首层时延降低 ≥50%。</a:t>
             </a:r>
           </a:p>
           <a:p>
@@ -12021,7 +12021,7 @@
                 </a:solidFill>
                 <a:latin typeface="Microsoft YaHei"/>
               </a:rPr>
-              <a:t>输出 11 份标准验证报告、38 条 SR 对账表与详细设计说明书。</a:t>
+              <a:t>输出 12 份标准验证报告、38 条 SR 对账表与详细设计说明书。</a:t>
             </a:r>
           </a:p>
           <a:p>
@@ -13207,7 +13207,7 @@
               </a:defRPr>
             </a:pPr>
             <a:r>
-              <a:t>3. 11 项关键技术实测证据包与对账集</a:t>
+              <a:t>3. 12 项关键技术实测证据包与对账集</a:t>
             </a:r>
             <a:r>
               <a:rPr sz="950" b="1">
@@ -13292,7 +13292,7 @@
                 </a:solidFill>
                 <a:latin typeface="Microsoft YaHei"/>
               </a:rPr>
-              <a:t>交付 11 份标准技术报告 (PVT-00~09 及 CVT-01)，含千组基准测试打点。</a:t>
+              <a:t>交付 12 份标准技术报告 (PVT-00~10 及 CVT-01)，含千组基准测试打点。</a:t>
             </a:r>
           </a:p>
           <a:p>
@@ -13323,7 +13323,7 @@
                 </a:solidFill>
                 <a:latin typeface="Microsoft YaHei"/>
               </a:rPr>
-              <a:t>提供基于体系结构第一性原理的严密量化推导与测试结论分析。</a:t>
+              <a:t>提供网络排队动力学与多卡协同短板的第一性原理量化推导与实测分析。</a:t>
             </a:r>
           </a:p>
           <a:p>
@@ -13407,7 +13407,7 @@
                 </a:solidFill>
                 <a:latin typeface="Microsoft YaHei"/>
               </a:rPr>
-              <a:t>真实记录网络流量、显存带宽与 CPU 负载的微秒级监控曲线。</a:t>
+              <a:t>真实记录 Incast 队列深度、Coflow 偏斜与 CPU 负载的微秒级监控曲线。</a:t>
             </a:r>
           </a:p>
           <a:p>
@@ -14692,7 +14692,7 @@
                 </a:solidFill>
                 <a:latin typeface="Microsoft YaHei"/>
               </a:rPr>
-              <a:t> 与 Incast。</a:t>
+              <a:t> 与 Incast/Coflow。</a:t>
             </a:r>
           </a:p>
           <a:p>
